--- a/slides/Session 2 - Build as a Team.pptx
+++ b/slides/Session 2 - Build as a Team.pptx
@@ -8394,7 +8394,7 @@
         <p:spPr>
           <a:xfrm>
             <a:off x="6350000" y="3556000"/>
-            <a:ext cx="5283200" cy="381000"/>
+            <a:ext cx="5283200" cy="396240"/>
           </a:xfrm>
           <a:prstGeom prst="rect">
             <a:avLst/>
@@ -8436,7 +8436,7 @@
         <p:spPr>
           <a:xfrm>
             <a:off x="6350000" y="3975100"/>
-            <a:ext cx="5283200" cy="381000"/>
+            <a:ext cx="5283200" cy="690880"/>
           </a:xfrm>
           <a:prstGeom prst="rect">
             <a:avLst/>
@@ -8477,7 +8477,7 @@
         </p:nvSpPr>
         <p:spPr>
           <a:xfrm>
-            <a:off x="6350000" y="4508500"/>
+            <a:off x="6350000" y="4805680"/>
             <a:ext cx="5283200" cy="254000"/>
           </a:xfrm>
           <a:prstGeom prst="rect">

--- a/slides/Session 2 - Build as a Team.pptx
+++ b/slides/Session 2 - Build as a Team.pptx
@@ -3248,7 +3248,7 @@
                 <a:ea typeface="IBM Plex Mono" pitchFamily="34" charset="-122"/>
                 <a:cs typeface="IBM Plex Mono" pitchFamily="34" charset="-120"/>
               </a:rPr>
-              <a:t>Fig. 7 — mob the thinking, parallelise the building</a:t>
+              <a:t>Fig. 8 — mob the thinking, parallelise the building</a:t>
             </a:r>
             <a:endParaRPr lang="en-US" sz="1200" dirty="0"/>
           </a:p>
@@ -3617,7 +3617,7 @@
                 <a:ea typeface="IBM Plex Mono" pitchFamily="34" charset="-122"/>
                 <a:cs typeface="IBM Plex Mono" pitchFamily="34" charset="-120"/>
               </a:rPr>
-              <a:t>Fig. 8 — five briefs, five traps</a:t>
+              <a:t>Fig. 9 — five briefs, five traps</a:t>
             </a:r>
             <a:endParaRPr lang="en-US" sz="1200" dirty="0"/>
           </a:p>
@@ -10797,7 +10797,7 @@
                 <a:ea typeface="IBM Plex Mono" pitchFamily="34" charset="-122"/>
                 <a:cs typeface="IBM Plex Mono" pitchFamily="34" charset="-120"/>
               </a:rPr>
-              <a:t>Fig. 5 — the ownership map</a:t>
+              <a:t>Fig. 6 — the ownership map</a:t>
             </a:r>
             <a:endParaRPr lang="en-US" sz="1200" dirty="0"/>
           </a:p>
@@ -11166,7 +11166,7 @@
                 <a:ea typeface="IBM Plex Mono" pitchFamily="34" charset="-122"/>
                 <a:cs typeface="IBM Plex Mono" pitchFamily="34" charset="-120"/>
               </a:rPr>
-              <a:t>Fig. 6 — the road your code travels</a:t>
+              <a:t>Fig. 7 — the road your code travels</a:t>
             </a:r>
             <a:endParaRPr lang="en-US" sz="1200" dirty="0"/>
           </a:p>

--- a/slides/Session 2 - Build as a Team.pptx
+++ b/slides/Session 2 - Build as a Team.pptx
@@ -3248,7 +3248,7 @@
                 <a:ea typeface="IBM Plex Mono" pitchFamily="34" charset="-122"/>
                 <a:cs typeface="IBM Plex Mono" pitchFamily="34" charset="-120"/>
               </a:rPr>
-              <a:t>Fig. 8 — mob the thinking, parallelise the building</a:t>
+              <a:t>Fig. 9 — mob the thinking, parallelise the building</a:t>
             </a:r>
             <a:endParaRPr lang="en-US" sz="1200" dirty="0"/>
           </a:p>
@@ -3617,7 +3617,7 @@
                 <a:ea typeface="IBM Plex Mono" pitchFamily="34" charset="-122"/>
                 <a:cs typeface="IBM Plex Mono" pitchFamily="34" charset="-120"/>
               </a:rPr>
-              <a:t>Fig. 9 — five briefs, five traps</a:t>
+              <a:t>Fig. 10 — five briefs, five traps</a:t>
             </a:r>
             <a:endParaRPr lang="en-US" sz="1200" dirty="0"/>
           </a:p>
@@ -10797,7 +10797,7 @@
                 <a:ea typeface="IBM Plex Mono" pitchFamily="34" charset="-122"/>
                 <a:cs typeface="IBM Plex Mono" pitchFamily="34" charset="-120"/>
               </a:rPr>
-              <a:t>Fig. 6 — the ownership map</a:t>
+              <a:t>Fig. 7 — the ownership map</a:t>
             </a:r>
             <a:endParaRPr lang="en-US" sz="1200" dirty="0"/>
           </a:p>
@@ -11166,7 +11166,7 @@
                 <a:ea typeface="IBM Plex Mono" pitchFamily="34" charset="-122"/>
                 <a:cs typeface="IBM Plex Mono" pitchFamily="34" charset="-120"/>
               </a:rPr>
-              <a:t>Fig. 7 — the road your code travels</a:t>
+              <a:t>Fig. 8 — the road your code travels</a:t>
             </a:r>
             <a:endParaRPr lang="en-US" sz="1200" dirty="0"/>
           </a:p>
